--- a/templates/posts/october/2026-10-01-thu-ig-coffee-myth.pptx
+++ b/templates/posts/october/2026-10-01-thu-ig-coffee-myth.pptx
@@ -5050,7 +5050,7 @@
       </p:sp>
       <p:pic>
         <p:nvPicPr>
-          <p:cNvPr id="4" name="Picture 3" descr="7202999141120139858.jpg"/>
+          <p:cNvPr id="4" name="Picture 3" descr="3492673919084242612.jpg"/>
           <p:cNvPicPr>
             <a:picLocks noChangeAspect="1"/>
           </p:cNvPicPr>

--- a/templates/posts/october/2026-10-01-thu-ig-coffee-myth.pptx
+++ b/templates/posts/october/2026-10-01-thu-ig-coffee-myth.pptx
@@ -5050,7 +5050,7 @@
       </p:sp>
       <p:pic>
         <p:nvPicPr>
-          <p:cNvPr id="4" name="Picture 3" descr="3492673919084242612.jpg"/>
+          <p:cNvPr id="4" name="Picture 3" descr="686276581421057197.jpg"/>
           <p:cNvPicPr>
             <a:picLocks noChangeAspect="1"/>
           </p:cNvPicPr>

--- a/templates/posts/october/2026-10-01-thu-ig-coffee-myth.pptx
+++ b/templates/posts/october/2026-10-01-thu-ig-coffee-myth.pptx
@@ -5050,7 +5050,7 @@
       </p:sp>
       <p:pic>
         <p:nvPicPr>
-          <p:cNvPr id="4" name="Picture 3" descr="686276581421057197.jpg"/>
+          <p:cNvPr id="4" name="Picture 3" descr="8889075969577039016.jpg"/>
           <p:cNvPicPr>
             <a:picLocks noChangeAspect="1"/>
           </p:cNvPicPr>

--- a/templates/posts/october/2026-10-01-thu-ig-coffee-myth.pptx
+++ b/templates/posts/october/2026-10-01-thu-ig-coffee-myth.pptx
@@ -5050,7 +5050,7 @@
       </p:sp>
       <p:pic>
         <p:nvPicPr>
-          <p:cNvPr id="4" name="Picture 3" descr="8889075969577039016.jpg"/>
+          <p:cNvPr id="4" name="Picture 3" descr="7693775305874750281.jpg"/>
           <p:cNvPicPr>
             <a:picLocks noChangeAspect="1"/>
           </p:cNvPicPr>

--- a/templates/posts/october/2026-10-01-thu-ig-coffee-myth.pptx
+++ b/templates/posts/october/2026-10-01-thu-ig-coffee-myth.pptx
@@ -4230,92 +4230,33 @@
           </a:p>
         </p:txBody>
       </p:sp>
-      <p:sp>
-        <p:nvSpPr>
-          <p:cNvPr id="9" name="Oval 8"/>
-          <p:cNvSpPr/>
+      <p:pic>
+        <p:nvPicPr>
+          <p:cNvPr id="9" name="Picture 8" descr="foundation-logo-white.png"/>
+          <p:cNvPicPr>
+            <a:picLocks noChangeAspect="1"/>
+          </p:cNvPicPr>
           <p:nvPr/>
-        </p:nvSpPr>
-        <p:spPr>
-          <a:xfrm>
-            <a:off x="8667750" y="11239500"/>
-            <a:ext cx="857250" cy="857250"/>
-          </a:xfrm>
-          <a:prstGeom prst="ellipse">
-            <a:avLst/>
-          </a:prstGeom>
-          <a:noFill/>
-          <a:ln w="19050">
-            <a:solidFill>
-              <a:srgbClr val="F4F1EA"/>
-            </a:solidFill>
-          </a:ln>
-          <a:effectLst/>
-        </p:spPr>
-        <p:style>
-          <a:lnRef idx="1">
-            <a:schemeClr val="accent1"/>
-          </a:lnRef>
-          <a:fillRef idx="3">
-            <a:schemeClr val="accent1"/>
-          </a:fillRef>
-          <a:effectRef idx="2">
-            <a:schemeClr val="accent1"/>
-          </a:effectRef>
-          <a:fontRef idx="minor">
-            <a:schemeClr val="lt1"/>
-          </a:fontRef>
-        </p:style>
-        <p:txBody>
-          <a:bodyPr rtlCol="0" anchor="ctr"/>
-          <a:lstStyle/>
-          <a:p>
-            <a:pPr algn="ctr"/>
-          </a:p>
-        </p:txBody>
-      </p:sp>
-      <p:sp>
-        <p:nvSpPr>
-          <p:cNvPr id="10" name="TextBox 9"/>
-          <p:cNvSpPr txBox="1"/>
-          <p:nvPr/>
-        </p:nvSpPr>
-        <p:spPr>
-          <a:xfrm>
-            <a:off x="8667750" y="11239500"/>
-            <a:ext cx="857250" cy="857250"/>
+        </p:nvPicPr>
+        <p:blipFill>
+          <a:blip r:embed="rId3"/>
+          <a:stretch>
+            <a:fillRect/>
+          </a:stretch>
+        </p:blipFill>
+        <p:spPr>
+          <a:xfrm>
+            <a:off x="8571501" y="11239500"/>
+            <a:ext cx="953498" cy="857250"/>
           </a:xfrm>
           <a:prstGeom prst="rect">
             <a:avLst/>
           </a:prstGeom>
-          <a:noFill/>
-        </p:spPr>
-        <p:txBody>
-          <a:bodyPr wrap="square" lIns="0" rIns="0" tIns="0" bIns="0" anchor="ctr">
-            <a:spAutoFit/>
-          </a:bodyPr>
-          <a:lstStyle/>
-          <a:p>
-            <a:pPr algn="ctr">
-              <a:lnSpc>
-                <a:spcPct val="120000"/>
-              </a:lnSpc>
-            </a:pPr>
-            <a:r>
-              <a:rPr sz="1800" b="1" i="0">
-                <a:solidFill>
-                  <a:srgbClr val="F4F1EA"/>
-                </a:solidFill>
-                <a:latin typeface="Montserrat"/>
-              </a:rPr>
-              <a:t>LOGO</a:t>
-            </a:r>
-          </a:p>
-        </p:txBody>
-      </p:sp>
-      <p:sp>
-        <p:nvSpPr>
-          <p:cNvPr id="11" name="TextBox 10"/>
+        </p:spPr>
+      </p:pic>
+      <p:sp>
+        <p:nvSpPr>
+          <p:cNvPr id="10" name="TextBox 9"/>
           <p:cNvSpPr txBox="1"/>
           <p:nvPr/>
         </p:nvSpPr>
@@ -5050,7 +4991,7 @@
       </p:sp>
       <p:pic>
         <p:nvPicPr>
-          <p:cNvPr id="4" name="Picture 3" descr="7693775305874750281.jpg"/>
+          <p:cNvPr id="4" name="Picture 3" descr="6294183290294922966.jpg"/>
           <p:cNvPicPr>
             <a:picLocks noChangeAspect="1"/>
           </p:cNvPicPr>
@@ -5521,92 +5462,33 @@
           </a:p>
         </p:txBody>
       </p:sp>
-      <p:sp>
-        <p:nvSpPr>
-          <p:cNvPr id="9" name="Oval 8"/>
-          <p:cNvSpPr/>
+      <p:pic>
+        <p:nvPicPr>
+          <p:cNvPr id="9" name="Picture 8" descr="foundation-logo-white.png"/>
+          <p:cNvPicPr>
+            <a:picLocks noChangeAspect="1"/>
+          </p:cNvPicPr>
           <p:nvPr/>
-        </p:nvSpPr>
-        <p:spPr>
-          <a:xfrm>
-            <a:off x="8667750" y="11239500"/>
-            <a:ext cx="857250" cy="857250"/>
-          </a:xfrm>
-          <a:prstGeom prst="ellipse">
-            <a:avLst/>
-          </a:prstGeom>
-          <a:noFill/>
-          <a:ln w="19050">
-            <a:solidFill>
-              <a:srgbClr val="F4F1EA"/>
-            </a:solidFill>
-          </a:ln>
-          <a:effectLst/>
-        </p:spPr>
-        <p:style>
-          <a:lnRef idx="1">
-            <a:schemeClr val="accent1"/>
-          </a:lnRef>
-          <a:fillRef idx="3">
-            <a:schemeClr val="accent1"/>
-          </a:fillRef>
-          <a:effectRef idx="2">
-            <a:schemeClr val="accent1"/>
-          </a:effectRef>
-          <a:fontRef idx="minor">
-            <a:schemeClr val="lt1"/>
-          </a:fontRef>
-        </p:style>
-        <p:txBody>
-          <a:bodyPr rtlCol="0" anchor="ctr"/>
-          <a:lstStyle/>
-          <a:p>
-            <a:pPr algn="ctr"/>
-          </a:p>
-        </p:txBody>
-      </p:sp>
-      <p:sp>
-        <p:nvSpPr>
-          <p:cNvPr id="10" name="TextBox 9"/>
-          <p:cNvSpPr txBox="1"/>
-          <p:nvPr/>
-        </p:nvSpPr>
-        <p:spPr>
-          <a:xfrm>
-            <a:off x="8667750" y="11239500"/>
-            <a:ext cx="857250" cy="857250"/>
+        </p:nvPicPr>
+        <p:blipFill>
+          <a:blip r:embed="rId3"/>
+          <a:stretch>
+            <a:fillRect/>
+          </a:stretch>
+        </p:blipFill>
+        <p:spPr>
+          <a:xfrm>
+            <a:off x="8571501" y="11239500"/>
+            <a:ext cx="953498" cy="857250"/>
           </a:xfrm>
           <a:prstGeom prst="rect">
             <a:avLst/>
           </a:prstGeom>
-          <a:noFill/>
-        </p:spPr>
-        <p:txBody>
-          <a:bodyPr wrap="square" lIns="0" rIns="0" tIns="0" bIns="0" anchor="ctr">
-            <a:spAutoFit/>
-          </a:bodyPr>
-          <a:lstStyle/>
-          <a:p>
-            <a:pPr algn="ctr">
-              <a:lnSpc>
-                <a:spcPct val="120000"/>
-              </a:lnSpc>
-            </a:pPr>
-            <a:r>
-              <a:rPr sz="1800" b="1" i="0">
-                <a:solidFill>
-                  <a:srgbClr val="F4F1EA"/>
-                </a:solidFill>
-                <a:latin typeface="Montserrat"/>
-              </a:rPr>
-              <a:t>LOGO</a:t>
-            </a:r>
-          </a:p>
-        </p:txBody>
-      </p:sp>
-      <p:sp>
-        <p:nvSpPr>
-          <p:cNvPr id="11" name="TextBox 10"/>
+        </p:spPr>
+      </p:pic>
+      <p:sp>
+        <p:nvSpPr>
+          <p:cNvPr id="10" name="TextBox 9"/>
           <p:cNvSpPr txBox="1"/>
           <p:nvPr/>
         </p:nvSpPr>

--- a/templates/posts/october/2026-10-01-thu-ig-coffee-myth.pptx
+++ b/templates/posts/october/2026-10-01-thu-ig-coffee-myth.pptx
@@ -3930,7 +3930,7 @@
     <p:bg>
       <p:bgPr>
         <a:solidFill>
-          <a:srgbClr val="22371F"/>
+          <a:srgbClr val="1E3F1D"/>
         </a:solidFill>
         <a:effectLst/>
       </p:bgPr>
@@ -4040,7 +4040,7 @@
             <a:avLst/>
           </a:prstGeom>
           <a:solidFill>
-            <a:srgbClr val="DBE6A7"/>
+            <a:srgbClr val="B1BCB1"/>
           </a:solidFill>
           <a:ln>
             <a:noFill/>
@@ -4099,7 +4099,7 @@
             <a:r>
               <a:rPr sz="2200" b="1" i="0" spc="200">
                 <a:solidFill>
-                  <a:srgbClr val="DBE6A7"/>
+                  <a:srgbClr val="B1BCB1"/>
                 </a:solidFill>
                 <a:latin typeface="Montserrat"/>
               </a:rPr>
@@ -4138,7 +4138,7 @@
             <a:r>
               <a:rPr sz="6400" b="1" i="0">
                 <a:solidFill>
-                  <a:srgbClr val="F4F1EA"/>
+                  <a:srgbClr val="F3F1EA"/>
                 </a:solidFill>
                 <a:latin typeface="Montserrat"/>
               </a:rPr>
@@ -4162,7 +4162,7 @@
             <a:avLst/>
           </a:prstGeom>
           <a:solidFill>
-            <a:srgbClr val="DBE6A7"/>
+            <a:srgbClr val="B1BCB1"/>
           </a:solidFill>
           <a:ln>
             <a:noFill/>
@@ -4221,7 +4221,7 @@
             <a:r>
               <a:rPr sz="3000" b="0" i="0">
                 <a:solidFill>
-                  <a:srgbClr val="DBE6A7"/>
+                  <a:srgbClr val="B1BCB1"/>
                 </a:solidFill>
                 <a:latin typeface="Source Sans 3"/>
               </a:rPr>
@@ -4284,7 +4284,7 @@
             <a:r>
               <a:rPr sz="2000" b="0" i="0">
                 <a:solidFill>
-                  <a:srgbClr val="F4F1EA">
+                  <a:srgbClr val="F3F1EA">
                     <a:alpha val="60000"/>
                   </a:srgbClr>
                 </a:solidFill>
@@ -4309,7 +4309,7 @@
     <p:bg>
       <p:bgPr>
         <a:solidFill>
-          <a:srgbClr val="F4F1EA"/>
+          <a:srgbClr val="F3F1EA"/>
         </a:solidFill>
         <a:effectLst/>
       </p:bgPr>
@@ -4351,7 +4351,7 @@
             <a:r>
               <a:rPr sz="14000" b="1" i="0">
                 <a:solidFill>
-                  <a:srgbClr val="156826">
+                  <a:srgbClr val="31662F">
                     <a:alpha val="25000"/>
                   </a:srgbClr>
                 </a:solidFill>
@@ -4392,7 +4392,7 @@
             <a:r>
               <a:rPr sz="4600" b="1" i="0">
                 <a:solidFill>
-                  <a:srgbClr val="22371F"/>
+                  <a:srgbClr val="1E3F1D"/>
                 </a:solidFill>
                 <a:latin typeface="Montserrat"/>
               </a:rPr>
@@ -4456,7 +4456,7 @@
     <p:bg>
       <p:bgPr>
         <a:solidFill>
-          <a:srgbClr val="F4F1EA"/>
+          <a:srgbClr val="F3F1EA"/>
         </a:solidFill>
         <a:effectLst/>
       </p:bgPr>
@@ -4498,7 +4498,7 @@
             <a:r>
               <a:rPr sz="14000" b="1" i="0">
                 <a:solidFill>
-                  <a:srgbClr val="156826">
+                  <a:srgbClr val="31662F">
                     <a:alpha val="25000"/>
                   </a:srgbClr>
                 </a:solidFill>
@@ -4539,7 +4539,7 @@
             <a:r>
               <a:rPr sz="4600" b="1" i="0">
                 <a:solidFill>
-                  <a:srgbClr val="22371F"/>
+                  <a:srgbClr val="1E3F1D"/>
                 </a:solidFill>
                 <a:latin typeface="Montserrat"/>
               </a:rPr>
@@ -4603,7 +4603,7 @@
     <p:bg>
       <p:bgPr>
         <a:solidFill>
-          <a:srgbClr val="F4F1EA"/>
+          <a:srgbClr val="F3F1EA"/>
         </a:solidFill>
         <a:effectLst/>
       </p:bgPr>
@@ -4645,7 +4645,7 @@
             <a:r>
               <a:rPr sz="14000" b="1" i="0">
                 <a:solidFill>
-                  <a:srgbClr val="156826">
+                  <a:srgbClr val="31662F">
                     <a:alpha val="25000"/>
                   </a:srgbClr>
                 </a:solidFill>
@@ -4686,7 +4686,7 @@
             <a:r>
               <a:rPr sz="4600" b="1" i="0">
                 <a:solidFill>
-                  <a:srgbClr val="22371F"/>
+                  <a:srgbClr val="1E3F1D"/>
                 </a:solidFill>
                 <a:latin typeface="Montserrat"/>
               </a:rPr>
@@ -4750,7 +4750,7 @@
     <p:bg>
       <p:bgPr>
         <a:solidFill>
-          <a:srgbClr val="F4F1EA"/>
+          <a:srgbClr val="F3F1EA"/>
         </a:solidFill>
         <a:effectLst/>
       </p:bgPr>
@@ -4792,7 +4792,7 @@
             <a:r>
               <a:rPr sz="14000" b="1" i="0">
                 <a:solidFill>
-                  <a:srgbClr val="156826">
+                  <a:srgbClr val="31662F">
                     <a:alpha val="25000"/>
                   </a:srgbClr>
                 </a:solidFill>
@@ -4833,7 +4833,7 @@
             <a:r>
               <a:rPr sz="4600" b="1" i="0">
                 <a:solidFill>
-                  <a:srgbClr val="22371F"/>
+                  <a:srgbClr val="1E3F1D"/>
                 </a:solidFill>
                 <a:latin typeface="Montserrat"/>
               </a:rPr>
@@ -4897,7 +4897,7 @@
     <p:bg>
       <p:bgPr>
         <a:solidFill>
-          <a:srgbClr val="F4F1EA"/>
+          <a:srgbClr val="F3F1EA"/>
         </a:solidFill>
         <a:effectLst/>
       </p:bgPr>
@@ -4939,7 +4939,7 @@
             <a:r>
               <a:rPr sz="14000" b="1" i="0">
                 <a:solidFill>
-                  <a:srgbClr val="156826">
+                  <a:srgbClr val="31662F">
                     <a:alpha val="25000"/>
                   </a:srgbClr>
                 </a:solidFill>
@@ -4980,7 +4980,7 @@
             <a:r>
               <a:rPr sz="4600" b="1" i="0">
                 <a:solidFill>
-                  <a:srgbClr val="22371F"/>
+                  <a:srgbClr val="1E3F1D"/>
                 </a:solidFill>
                 <a:latin typeface="Montserrat"/>
               </a:rPr>
@@ -4991,7 +4991,7 @@
       </p:sp>
       <p:pic>
         <p:nvPicPr>
-          <p:cNvPr id="4" name="Picture 3" descr="6294183290294922966.jpg"/>
+          <p:cNvPr id="4" name="Picture 3" descr="5551272469319066653.jpg"/>
           <p:cNvPicPr>
             <a:picLocks noChangeAspect="1"/>
           </p:cNvPicPr>
@@ -5070,7 +5070,7 @@
     <p:bg>
       <p:bgPr>
         <a:solidFill>
-          <a:srgbClr val="156826"/>
+          <a:srgbClr val="31662F"/>
         </a:solidFill>
         <a:effectLst/>
       </p:bgPr>
@@ -5112,7 +5112,7 @@
             <a:r>
               <a:rPr sz="5400" b="1" i="0">
                 <a:solidFill>
-                  <a:srgbClr val="F4F1EA"/>
+                  <a:srgbClr val="F3F1EA"/>
                 </a:solidFill>
                 <a:latin typeface="Montserrat"/>
               </a:rPr>
@@ -5160,7 +5160,7 @@
             </a:pathLst>
           </a:custGeom>
           <a:solidFill>
-            <a:srgbClr val="F4F1EA"/>
+            <a:srgbClr val="F3F1EA"/>
           </a:solidFill>
           <a:ln>
             <a:noFill/>
@@ -5228,7 +5228,7 @@
             </a:pathLst>
           </a:custGeom>
           <a:solidFill>
-            <a:srgbClr val="156826"/>
+            <a:srgbClr val="31662F"/>
           </a:solidFill>
           <a:ln>
             <a:noFill/>
@@ -5287,7 +5287,7 @@
             <a:r>
               <a:rPr sz="2200" b="1" i="0">
                 <a:solidFill>
-                  <a:srgbClr val="F4F1EA"/>
+                  <a:srgbClr val="F3F1EA"/>
                 </a:solidFill>
                 <a:latin typeface="Montserrat"/>
               </a:rPr>
@@ -5332,7 +5332,7 @@
             </a:pathLst>
           </a:custGeom>
           <a:solidFill>
-            <a:srgbClr val="F4F1EA"/>
+            <a:srgbClr val="F3F1EA"/>
           </a:solidFill>
           <a:ln>
             <a:noFill/>
@@ -5394,7 +5394,7 @@
             </a:pathLst>
           </a:custGeom>
           <a:solidFill>
-            <a:srgbClr val="156826"/>
+            <a:srgbClr val="31662F"/>
           </a:solidFill>
           <a:ln>
             <a:noFill/>
@@ -5453,7 +5453,7 @@
             <a:r>
               <a:rPr sz="2200" b="1" i="0">
                 <a:solidFill>
-                  <a:srgbClr val="F4F1EA"/>
+                  <a:srgbClr val="F3F1EA"/>
                 </a:solidFill>
                 <a:latin typeface="Montserrat"/>
               </a:rPr>
@@ -5516,7 +5516,7 @@
             <a:r>
               <a:rPr sz="2000" b="0" i="0">
                 <a:solidFill>
-                  <a:srgbClr val="F4F1EA">
+                  <a:srgbClr val="F3F1EA">
                     <a:alpha val="60000"/>
                   </a:srgbClr>
                 </a:solidFill>

--- a/templates/posts/october/2026-10-01-thu-ig-coffee-myth.pptx
+++ b/templates/posts/october/2026-10-01-thu-ig-coffee-myth.pptx
@@ -4991,7 +4991,7 @@
       </p:sp>
       <p:pic>
         <p:nvPicPr>
-          <p:cNvPr id="4" name="Picture 3" descr="5551272469319066653.jpg"/>
+          <p:cNvPr id="4" name="Picture 3" descr="4593821941455520392.jpg"/>
           <p:cNvPicPr>
             <a:picLocks noChangeAspect="1"/>
           </p:cNvPicPr>
